--- a/classes/parte-8-blue-team-deteccion-y-soc/195-threat-intelligence-operacional/clase-195-presentacion.pptx
+++ b/classes/parte-8-blue-team-deteccion-y-soc/195-threat-intelligence-operacional/clase-195-presentacion.pptx
@@ -17,6 +17,11 @@
     <p:sldId id="265" r:id="rId16"/>
     <p:sldId id="266" r:id="rId17"/>
     <p:sldId id="267" r:id="rId18"/>
+    <p:sldId id="268" r:id="rId19"/>
+    <p:sldId id="269" r:id="rId20"/>
+    <p:sldId id="270" r:id="rId21"/>
+    <p:sldId id="271" r:id="rId22"/>
+    <p:sldId id="272" r:id="rId23"/>
   </p:sldIdLst>
   <p:sldSz cx="9144000" cy="6858000" type="screen4x3"/>
   <p:notesSz cx="6858000" cy="9144000"/>
@@ -3198,7 +3203,7 @@
                   <a:srgbClr val="0B3D2E"/>
                 </a:solidFill>
               </a:rPr>
-              <a:t>⚠️ Errores comunes</a:t>
+              <a:t>🧰 Herramientas y preparación</a:t>
             </a:r>
           </a:p>
         </p:txBody>
@@ -3236,67 +3241,67 @@
                   <a:srgbClr val="22282E"/>
                 </a:solidFill>
               </a:rPr>
-              <a:t>•  Miles de falsos positivos por IOCs — Feeds sin scoring/caducidad; filtra por fiabilidad y expira</a:t>
-            </a:r>
-          </a:p>
-          <a:p>
-            <a:pPr>
-              <a:spcAft>
-                <a:spcPts val="600"/>
-              </a:spcAft>
-            </a:pPr>
-            <a:r>
-              <a:rPr sz="1500">
-                <a:solidFill>
-                  <a:srgbClr val="22282E"/>
-                </a:solidFill>
-              </a:rPr>
-              <a:t>•  Intel que nadie usa — Se acumula sin operacionalizar; cierra el ciclo hacia detección</a:t>
-            </a:r>
-          </a:p>
-          <a:p>
-            <a:pPr>
-              <a:spcAft>
-                <a:spcPts val="600"/>
-              </a:spcAft>
-            </a:pPr>
-            <a:r>
-              <a:rPr sz="1500">
-                <a:solidFill>
-                  <a:srgbClr val="22282E"/>
-                </a:solidFill>
-              </a:rPr>
-              <a:t>•  Hits sin contexto — Falta enriquecimiento; añade campaña, TTP y TLP al indicador</a:t>
-            </a:r>
-          </a:p>
-          <a:p>
-            <a:pPr>
-              <a:spcAft>
-                <a:spcPts val="600"/>
-              </a:spcAft>
-            </a:pPr>
-            <a:r>
-              <a:rPr sz="1500">
-                <a:solidFill>
-                  <a:srgbClr val="22282E"/>
-                </a:solidFill>
-              </a:rPr>
-              <a:t>•  Compartes intel sensible — Ignoras el TLP; respeta el marco de compartición</a:t>
-            </a:r>
-          </a:p>
-          <a:p>
-            <a:pPr>
-              <a:spcAft>
-                <a:spcPts val="600"/>
-              </a:spcAft>
-            </a:pPr>
-            <a:r>
-              <a:rPr sz="1500">
-                <a:solidFill>
-                  <a:srgbClr val="22282E"/>
-                </a:solidFill>
-              </a:rPr>
-              <a:t>•  Solo IOCs, nunca TTPs — Detección frágil; sube en la pirámide del dolor hacia comportamiento</a:t>
+              <a:t>•  MISP o OpenCTI desplegado en laboratorio (Docker) como TIP.</a:t>
+            </a:r>
+          </a:p>
+          <a:p>
+            <a:pPr>
+              <a:spcAft>
+                <a:spcPts val="600"/>
+              </a:spcAft>
+            </a:pPr>
+            <a:r>
+              <a:rPr sz="1500">
+                <a:solidFill>
+                  <a:srgbClr val="22282E"/>
+                </a:solidFill>
+              </a:rPr>
+              <a:t>•  Feeds abiertos (p. ej. abuse.ch, listas OSINT) para poblar la plataforma.</a:t>
+            </a:r>
+          </a:p>
+          <a:p>
+            <a:pPr>
+              <a:spcAft>
+                <a:spcPts val="600"/>
+              </a:spcAft>
+            </a:pPr>
+            <a:r>
+              <a:rPr sz="1500">
+                <a:solidFill>
+                  <a:srgbClr val="22282E"/>
+                </a:solidFill>
+              </a:rPr>
+              <a:t>•  Conector STIX/TAXII hacia tu SIEM para consumir indicadores.</a:t>
+            </a:r>
+          </a:p>
+          <a:p>
+            <a:pPr>
+              <a:spcAft>
+                <a:spcPts val="600"/>
+              </a:spcAft>
+            </a:pPr>
+            <a:r>
+              <a:rPr sz="1500">
+                <a:solidFill>
+                  <a:srgbClr val="22282E"/>
+                </a:solidFill>
+              </a:rPr>
+              <a:t>•  Tu SIEM con capacidad de lookups/threat match (Splunk, Elastic Threat Intel).</a:t>
+            </a:r>
+          </a:p>
+          <a:p>
+            <a:pPr>
+              <a:spcAft>
+                <a:spcPts val="600"/>
+              </a:spcAft>
+            </a:pPr>
+            <a:r>
+              <a:rPr sz="1500">
+                <a:solidFill>
+                  <a:srgbClr val="22282E"/>
+                </a:solidFill>
+              </a:rPr>
+              <a:t>•  Usa únicamente feeds y fuentes públicas o autorizadas; no distribuyas intel sensible fuera de su marco de compartición (TLP).</a:t>
             </a:r>
           </a:p>
         </p:txBody>
@@ -3347,7 +3352,7 @@
                   <a:srgbClr val="0B3D2E"/>
                 </a:solidFill>
               </a:rPr>
-              <a:t>❓ Preguntas frecuentes</a:t>
+              <a:t>🧪 Laboratorio guiado — De feed a detección</a:t>
             </a:r>
           </a:p>
         </p:txBody>
@@ -3385,82 +3390,97 @@
                   <a:srgbClr val="22282E"/>
                 </a:solidFill>
               </a:rPr>
-              <a:t>•  ❓ ¿Más feeds = más seguridad?</a:t>
-            </a:r>
-          </a:p>
-          <a:p>
-            <a:pPr>
-              <a:spcAft>
-                <a:spcPts val="600"/>
-              </a:spcAft>
-            </a:pPr>
-            <a:r>
-              <a:rPr sz="1500">
-                <a:solidFill>
-                  <a:srgbClr val="22282E"/>
-                </a:solidFill>
-              </a:rPr>
-              <a:t>•  No. Feeds sin curar generan ruido y falsos positivos. Vale más un puñado de fuentes fiables, puntuadas y caducadas que un torrente de IOCs muertos.</a:t>
-            </a:r>
-          </a:p>
-          <a:p>
-            <a:pPr>
-              <a:spcAft>
-                <a:spcPts val="600"/>
-              </a:spcAft>
-            </a:pPr>
-            <a:r>
-              <a:rPr sz="1500">
-                <a:solidFill>
-                  <a:srgbClr val="22282E"/>
-                </a:solidFill>
-              </a:rPr>
-              <a:t>•  ❓ ¿La intel táctica (IOCs) basta?</a:t>
-            </a:r>
-          </a:p>
-          <a:p>
-            <a:pPr>
-              <a:spcAft>
-                <a:spcPts val="600"/>
-              </a:spcAft>
-            </a:pPr>
-            <a:r>
-              <a:rPr sz="1500">
-                <a:solidFill>
-                  <a:srgbClr val="22282E"/>
-                </a:solidFill>
-              </a:rPr>
-              <a:t>•  Es útil pero volátil: el atacante cambia hash e IP en segundos. Complétala con intel operacional y TTPs, que son mucho más duraderos de detectar.</a:t>
-            </a:r>
-          </a:p>
-          <a:p>
-            <a:pPr>
-              <a:spcAft>
-                <a:spcPts val="600"/>
-              </a:spcAft>
-            </a:pPr>
-            <a:r>
-              <a:rPr sz="1500">
-                <a:solidFill>
-                  <a:srgbClr val="22282E"/>
-                </a:solidFill>
-              </a:rPr>
-              <a:t>•  ❓ ¿Qué es el TLP?</a:t>
-            </a:r>
-          </a:p>
-          <a:p>
-            <a:pPr>
-              <a:spcAft>
-                <a:spcPts val="600"/>
-              </a:spcAft>
-            </a:pPr>
-            <a:r>
-              <a:rPr sz="1500">
-                <a:solidFill>
-                  <a:srgbClr val="22282E"/>
-                </a:solidFill>
-              </a:rPr>
-              <a:t>•  El Traffic Light Protocol clasifica cuánto puedes difundir una información (RED/AMBER/GREEN/CLEAR). Respetarlo es clave para participar en comunidades de compartición.</a:t>
+              <a:t>•  Levanta el TIP. Despliega MISP/OpenCTI en Docker y accede al panel.</a:t>
+            </a:r>
+          </a:p>
+          <a:p>
+            <a:pPr>
+              <a:spcAft>
+                <a:spcPts val="600"/>
+              </a:spcAft>
+            </a:pPr>
+            <a:r>
+              <a:rPr sz="1500">
+                <a:solidFill>
+                  <a:srgbClr val="22282E"/>
+                </a:solidFill>
+              </a:rPr>
+              <a:t>•  Ingesta feeds. Habilita 2–3 feeds abiertos (p. ej. listas de C2/malware de abuse.ch) y sincroniza.</a:t>
+            </a:r>
+          </a:p>
+          <a:p>
+            <a:pPr>
+              <a:spcAft>
+                <a:spcPts val="600"/>
+              </a:spcAft>
+            </a:pPr>
+            <a:r>
+              <a:rPr sz="1500">
+                <a:solidFill>
+                  <a:srgbClr val="22282E"/>
+                </a:solidFill>
+              </a:rPr>
+              <a:t>•  Enriquece un evento. Toma un IOC de la clase 193 (dominio de tu beacon de laboratorio) y créalo como indicador con su contexto y TLP.</a:t>
+            </a:r>
+          </a:p>
+          <a:p>
+            <a:pPr>
+              <a:spcAft>
+                <a:spcPts val="600"/>
+              </a:spcAft>
+            </a:pPr>
+            <a:r>
+              <a:rPr sz="1500">
+                <a:solidFill>
+                  <a:srgbClr val="22282E"/>
+                </a:solidFill>
+              </a:rPr>
+              <a:t>•  Puntúa y caduca. Asigna un score y una fecha de expiración; revisa cómo la plataforma degrada indicadores viejos.</a:t>
+            </a:r>
+          </a:p>
+          <a:p>
+            <a:pPr>
+              <a:spcAft>
+                <a:spcPts val="600"/>
+              </a:spcAft>
+            </a:pPr>
+            <a:r>
+              <a:rPr sz="1500">
+                <a:solidFill>
+                  <a:srgbClr val="22282E"/>
+                </a:solidFill>
+              </a:rPr>
+              <a:t>•  Conecta al SIEM. Configura el consumo STIX/TAXII y un lookup de threat match sobre tráfico de red/DNS.</a:t>
+            </a:r>
+          </a:p>
+          <a:p>
+            <a:pPr>
+              <a:spcAft>
+                <a:spcPts val="600"/>
+              </a:spcAft>
+            </a:pPr>
+            <a:r>
+              <a:rPr sz="1500">
+                <a:solidFill>
+                  <a:srgbClr val="22282E"/>
+                </a:solidFill>
+              </a:rPr>
+              <a:t>•  Detecta con intel. Genera tráfico hacia un indicador de la lista y confirma que el SIEM lo marca.</a:t>
+            </a:r>
+          </a:p>
+          <a:p>
+            <a:pPr>
+              <a:spcAft>
+                <a:spcPts val="600"/>
+              </a:spcAft>
+            </a:pPr>
+            <a:r>
+              <a:rPr sz="1500">
+                <a:solidFill>
+                  <a:srgbClr val="22282E"/>
+                </a:solidFill>
+              </a:rPr>
+              <a:t>•  Prioriza por TTP. Mapea la campaña asociada a técnicas ATT&amp;CK y compárala con tu cobertura (clase 187).</a:t>
             </a:r>
           </a:p>
         </p:txBody>
@@ -3511,7 +3531,7 @@
                   <a:srgbClr val="0B3D2E"/>
                 </a:solidFill>
               </a:rPr>
-              <a:t>🔗 Referencias</a:t>
+              <a:t>✍️ Ejercicios</a:t>
             </a:r>
           </a:p>
         </p:txBody>
@@ -3549,71 +3569,712 @@
                   <a:srgbClr val="22282E"/>
                 </a:solidFill>
               </a:rPr>
-              <a:t>•  Murdoch, D. Blue Team Handbook: SOC, SIEM, and Threat Hunting Use Cases.</a:t>
-            </a:r>
-          </a:p>
-          <a:p>
-            <a:pPr>
-              <a:spcAft>
-                <a:spcPts val="600"/>
-              </a:spcAft>
-            </a:pPr>
-            <a:r>
-              <a:rPr sz="1500">
-                <a:solidFill>
-                  <a:srgbClr val="22282E"/>
-                </a:solidFill>
-              </a:rPr>
-              <a:t>•  MISP Project — &lt;https://www.misp-project.org/&gt;</a:t>
-            </a:r>
-          </a:p>
-          <a:p>
-            <a:pPr>
-              <a:spcAft>
-                <a:spcPts val="600"/>
-              </a:spcAft>
-            </a:pPr>
-            <a:r>
-              <a:rPr sz="1500">
-                <a:solidFill>
-                  <a:srgbClr val="22282E"/>
-                </a:solidFill>
-              </a:rPr>
-              <a:t>•  OpenCTI — &lt;https://www.opencti.io/&gt;</a:t>
-            </a:r>
-          </a:p>
-          <a:p>
-            <a:pPr>
-              <a:spcAft>
-                <a:spcPts val="600"/>
-              </a:spcAft>
-            </a:pPr>
-            <a:r>
-              <a:rPr sz="1500">
-                <a:solidFill>
-                  <a:srgbClr val="22282E"/>
-                </a:solidFill>
-              </a:rPr>
-              <a:t>•  OASIS STIX/TAXII — &lt;https://oasis-open.github.io/cti-documentation/&gt;</a:t>
-            </a:r>
-          </a:p>
-          <a:p>
-            <a:pPr>
-              <a:spcAft>
-                <a:spcPts val="600"/>
-              </a:spcAft>
-            </a:pPr>
-            <a:r>
-              <a:rPr sz="1500">
-                <a:solidFill>
-                  <a:srgbClr val="22282E"/>
-                </a:solidFill>
-              </a:rPr>
-              <a:t>•  FIRST, Traffic Light Protocol (TLP) — &lt;https://www.first.org/tlp/&gt;</a:t>
-            </a:r>
-          </a:p>
-        </p:txBody>
-      </p:sp>
+              <a:t>•  Clasifica 5 piezas de intel en estratégica/operacional/táctica.</a:t>
+            </a:r>
+          </a:p>
+          <a:p>
+            <a:pPr>
+              <a:spcAft>
+                <a:spcPts val="600"/>
+              </a:spcAft>
+            </a:pPr>
+            <a:r>
+              <a:rPr sz="1500">
+                <a:solidFill>
+                  <a:srgbClr val="22282E"/>
+                </a:solidFill>
+              </a:rPr>
+              <a:t>•  Explica por qué los IOCs caducan y cómo gestionarlo con scoring.</a:t>
+            </a:r>
+          </a:p>
+          <a:p>
+            <a:pPr>
+              <a:spcAft>
+                <a:spcPts val="600"/>
+              </a:spcAft>
+            </a:pPr>
+            <a:r>
+              <a:rPr sz="1500">
+                <a:solidFill>
+                  <a:srgbClr val="22282E"/>
+                </a:solidFill>
+              </a:rPr>
+              <a:t>•  Diseña el flujo del ciclo de inteligencia para tu SOC.</a:t>
+            </a:r>
+          </a:p>
+          <a:p>
+            <a:pPr>
+              <a:spcAft>
+                <a:spcPts val="600"/>
+              </a:spcAft>
+            </a:pPr>
+            <a:r>
+              <a:rPr sz="1500">
+                <a:solidFill>
+                  <a:srgbClr val="22282E"/>
+                </a:solidFill>
+              </a:rPr>
+              <a:t>•  Configura un lookup de threat match y prueba un hit.</a:t>
+            </a:r>
+          </a:p>
+          <a:p>
+            <a:pPr>
+              <a:spcAft>
+                <a:spcPts val="600"/>
+              </a:spcAft>
+            </a:pPr>
+            <a:r>
+              <a:rPr sz="1500">
+                <a:solidFill>
+                  <a:srgbClr val="22282E"/>
+                </a:solidFill>
+              </a:rPr>
+              <a:t>•  Compara MISP y OpenCTI en modelo de datos y casos de uso.</a:t>
+            </a:r>
+          </a:p>
+          <a:p>
+            <a:pPr>
+              <a:spcAft>
+                <a:spcPts val="600"/>
+              </a:spcAft>
+            </a:pPr>
+            <a:r>
+              <a:rPr sz="1500">
+                <a:solidFill>
+                  <a:srgbClr val="22282E"/>
+                </a:solidFill>
+              </a:rPr>
+              <a:t>•  Explica el semáforo TLP y cuándo se puede compartir cada nivel.</a:t>
+            </a:r>
+          </a:p>
+        </p:txBody>
+      </p:sp>
+    </p:spTree>
+  </p:cSld>
+  <p:clrMapOvr>
+    <a:masterClrMapping/>
+  </p:clrMapOvr>
+</p:sld>
+</file>
+
+<file path=ppt/slides/slide13.xml><?xml version="1.0" encoding="utf-8"?>
+<p:sld xmlns:a="http://schemas.openxmlformats.org/drawingml/2006/main" xmlns:p="http://schemas.openxmlformats.org/presentationml/2006/main" xmlns:r="http://schemas.openxmlformats.org/officeDocument/2006/relationships">
+  <p:cSld>
+    <p:spTree>
+      <p:nvGrpSpPr>
+        <p:cNvPr id="1" name=""/>
+        <p:cNvGrpSpPr/>
+        <p:nvPr/>
+      </p:nvGrpSpPr>
+      <p:grpSpPr/>
+      <p:sp>
+        <p:nvSpPr>
+          <p:cNvPr id="2" name="TextBox 1"/>
+          <p:cNvSpPr txBox="1"/>
+          <p:nvPr/>
+        </p:nvSpPr>
+        <p:spPr>
+          <a:xfrm>
+            <a:off x="457200" y="320040"/>
+            <a:ext cx="8229600" cy="822960"/>
+          </a:xfrm>
+          <a:prstGeom prst="rect">
+            <a:avLst/>
+          </a:prstGeom>
+          <a:noFill/>
+        </p:spPr>
+        <p:txBody>
+          <a:bodyPr wrap="square">
+            <a:spAutoFit/>
+          </a:bodyPr>
+          <a:lstStyle/>
+          <a:p>
+            <a:r>
+              <a:rPr sz="2600" b="1">
+                <a:solidFill>
+                  <a:srgbClr val="0B3D2E"/>
+                </a:solidFill>
+              </a:rPr>
+              <a:t>📝 Reto verificable</a:t>
+            </a:r>
+          </a:p>
+        </p:txBody>
+      </p:sp>
+      <p:sp>
+        <p:nvSpPr>
+          <p:cNvPr id="3" name="TextBox 2"/>
+          <p:cNvSpPr txBox="1"/>
+          <p:nvPr/>
+        </p:nvSpPr>
+        <p:spPr>
+          <a:xfrm>
+            <a:off x="457200" y="1280160"/>
+            <a:ext cx="8229600" cy="4937760"/>
+          </a:xfrm>
+          <a:prstGeom prst="rect">
+            <a:avLst/>
+          </a:prstGeom>
+          <a:noFill/>
+        </p:spPr>
+        <p:txBody>
+          <a:bodyPr wrap="square">
+            <a:spAutoFit/>
+          </a:bodyPr>
+          <a:lstStyle/>
+          <a:p>
+            <a:pPr>
+              <a:spcAft>
+                <a:spcPts val="600"/>
+              </a:spcAft>
+            </a:pPr>
+            <a:r>
+              <a:rPr sz="1500">
+                <a:solidFill>
+                  <a:srgbClr val="22282E"/>
+                </a:solidFill>
+              </a:rPr>
+              <a:t>•  Operacionaliza un conjunto de indicadores desde tu TIP hasta una detección funcional en el SIEM, con scoring y caducidad definidos. Criterio de aceptación: un evento de tu laboratorio que coincide…</a:t>
+            </a:r>
+          </a:p>
+        </p:txBody>
+      </p:sp>
+    </p:spTree>
+  </p:cSld>
+  <p:clrMapOvr>
+    <a:masterClrMapping/>
+  </p:clrMapOvr>
+</p:sld>
+</file>
+
+<file path=ppt/slides/slide14.xml><?xml version="1.0" encoding="utf-8"?>
+<p:sld xmlns:a="http://schemas.openxmlformats.org/drawingml/2006/main" xmlns:p="http://schemas.openxmlformats.org/presentationml/2006/main" xmlns:r="http://schemas.openxmlformats.org/officeDocument/2006/relationships">
+  <p:cSld>
+    <p:spTree>
+      <p:nvGrpSpPr>
+        <p:cNvPr id="1" name=""/>
+        <p:cNvGrpSpPr/>
+        <p:nvPr/>
+      </p:nvGrpSpPr>
+      <p:grpSpPr/>
+      <p:sp>
+        <p:nvSpPr>
+          <p:cNvPr id="2" name="TextBox 1"/>
+          <p:cNvSpPr txBox="1"/>
+          <p:nvPr/>
+        </p:nvSpPr>
+        <p:spPr>
+          <a:xfrm>
+            <a:off x="457200" y="320040"/>
+            <a:ext cx="8229600" cy="822960"/>
+          </a:xfrm>
+          <a:prstGeom prst="rect">
+            <a:avLst/>
+          </a:prstGeom>
+          <a:noFill/>
+        </p:spPr>
+        <p:txBody>
+          <a:bodyPr wrap="square">
+            <a:spAutoFit/>
+          </a:bodyPr>
+          <a:lstStyle/>
+          <a:p>
+            <a:r>
+              <a:rPr sz="2600" b="1">
+                <a:solidFill>
+                  <a:srgbClr val="0B3D2E"/>
+                </a:solidFill>
+              </a:rPr>
+              <a:t>⚠️ Errores comunes</a:t>
+            </a:r>
+          </a:p>
+        </p:txBody>
+      </p:sp>
+      <p:sp>
+        <p:nvSpPr>
+          <p:cNvPr id="3" name="TextBox 2"/>
+          <p:cNvSpPr txBox="1"/>
+          <p:nvPr/>
+        </p:nvSpPr>
+        <p:spPr>
+          <a:xfrm>
+            <a:off x="457200" y="1280160"/>
+            <a:ext cx="8229600" cy="4937760"/>
+          </a:xfrm>
+          <a:prstGeom prst="rect">
+            <a:avLst/>
+          </a:prstGeom>
+          <a:noFill/>
+        </p:spPr>
+        <p:txBody>
+          <a:bodyPr wrap="square">
+            <a:spAutoFit/>
+          </a:bodyPr>
+          <a:lstStyle/>
+          <a:p>
+            <a:pPr>
+              <a:spcAft>
+                <a:spcPts val="600"/>
+              </a:spcAft>
+            </a:pPr>
+            <a:r>
+              <a:rPr sz="1500">
+                <a:solidFill>
+                  <a:srgbClr val="22282E"/>
+                </a:solidFill>
+              </a:rPr>
+              <a:t>•  Miles de falsos positivos por IOCs — Feeds sin scoring/caducidad; filtra por fiabilidad y expira</a:t>
+            </a:r>
+          </a:p>
+          <a:p>
+            <a:pPr>
+              <a:spcAft>
+                <a:spcPts val="600"/>
+              </a:spcAft>
+            </a:pPr>
+            <a:r>
+              <a:rPr sz="1500">
+                <a:solidFill>
+                  <a:srgbClr val="22282E"/>
+                </a:solidFill>
+              </a:rPr>
+              <a:t>•  Intel que nadie usa — Se acumula sin operacionalizar; cierra el ciclo hacia detección</a:t>
+            </a:r>
+          </a:p>
+          <a:p>
+            <a:pPr>
+              <a:spcAft>
+                <a:spcPts val="600"/>
+              </a:spcAft>
+            </a:pPr>
+            <a:r>
+              <a:rPr sz="1500">
+                <a:solidFill>
+                  <a:srgbClr val="22282E"/>
+                </a:solidFill>
+              </a:rPr>
+              <a:t>•  Hits sin contexto — Falta enriquecimiento; añade campaña, TTP y TLP al indicador</a:t>
+            </a:r>
+          </a:p>
+          <a:p>
+            <a:pPr>
+              <a:spcAft>
+                <a:spcPts val="600"/>
+              </a:spcAft>
+            </a:pPr>
+            <a:r>
+              <a:rPr sz="1500">
+                <a:solidFill>
+                  <a:srgbClr val="22282E"/>
+                </a:solidFill>
+              </a:rPr>
+              <a:t>•  Compartes intel sensible — Ignoras el TLP; respeta el marco de compartición</a:t>
+            </a:r>
+          </a:p>
+          <a:p>
+            <a:pPr>
+              <a:spcAft>
+                <a:spcPts val="600"/>
+              </a:spcAft>
+            </a:pPr>
+            <a:r>
+              <a:rPr sz="1500">
+                <a:solidFill>
+                  <a:srgbClr val="22282E"/>
+                </a:solidFill>
+              </a:rPr>
+              <a:t>•  Solo IOCs, nunca TTPs — Detección frágil; sube en la pirámide del dolor hacia comportamiento</a:t>
+            </a:r>
+          </a:p>
+        </p:txBody>
+      </p:sp>
+    </p:spTree>
+  </p:cSld>
+  <p:clrMapOvr>
+    <a:masterClrMapping/>
+  </p:clrMapOvr>
+</p:sld>
+</file>
+
+<file path=ppt/slides/slide15.xml><?xml version="1.0" encoding="utf-8"?>
+<p:sld xmlns:a="http://schemas.openxmlformats.org/drawingml/2006/main" xmlns:p="http://schemas.openxmlformats.org/presentationml/2006/main" xmlns:r="http://schemas.openxmlformats.org/officeDocument/2006/relationships">
+  <p:cSld>
+    <p:spTree>
+      <p:nvGrpSpPr>
+        <p:cNvPr id="1" name=""/>
+        <p:cNvGrpSpPr/>
+        <p:nvPr/>
+      </p:nvGrpSpPr>
+      <p:grpSpPr/>
+      <p:sp>
+        <p:nvSpPr>
+          <p:cNvPr id="2" name="TextBox 1"/>
+          <p:cNvSpPr txBox="1"/>
+          <p:nvPr/>
+        </p:nvSpPr>
+        <p:spPr>
+          <a:xfrm>
+            <a:off x="457200" y="320040"/>
+            <a:ext cx="8229600" cy="822960"/>
+          </a:xfrm>
+          <a:prstGeom prst="rect">
+            <a:avLst/>
+          </a:prstGeom>
+          <a:noFill/>
+        </p:spPr>
+        <p:txBody>
+          <a:bodyPr wrap="square">
+            <a:spAutoFit/>
+          </a:bodyPr>
+          <a:lstStyle/>
+          <a:p>
+            <a:r>
+              <a:rPr sz="2600" b="1">
+                <a:solidFill>
+                  <a:srgbClr val="0B3D2E"/>
+                </a:solidFill>
+              </a:rPr>
+              <a:t>❓ Preguntas frecuentes</a:t>
+            </a:r>
+          </a:p>
+        </p:txBody>
+      </p:sp>
+      <p:sp>
+        <p:nvSpPr>
+          <p:cNvPr id="3" name="TextBox 2"/>
+          <p:cNvSpPr txBox="1"/>
+          <p:nvPr/>
+        </p:nvSpPr>
+        <p:spPr>
+          <a:xfrm>
+            <a:off x="457200" y="1280160"/>
+            <a:ext cx="8229600" cy="4937760"/>
+          </a:xfrm>
+          <a:prstGeom prst="rect">
+            <a:avLst/>
+          </a:prstGeom>
+          <a:noFill/>
+        </p:spPr>
+        <p:txBody>
+          <a:bodyPr wrap="square">
+            <a:spAutoFit/>
+          </a:bodyPr>
+          <a:lstStyle/>
+          <a:p>
+            <a:pPr>
+              <a:spcAft>
+                <a:spcPts val="600"/>
+              </a:spcAft>
+            </a:pPr>
+            <a:r>
+              <a:rPr sz="1500">
+                <a:solidFill>
+                  <a:srgbClr val="22282E"/>
+                </a:solidFill>
+              </a:rPr>
+              <a:t>•  ❓ ¿Más feeds = más seguridad?</a:t>
+            </a:r>
+          </a:p>
+          <a:p>
+            <a:pPr>
+              <a:spcAft>
+                <a:spcPts val="600"/>
+              </a:spcAft>
+            </a:pPr>
+            <a:r>
+              <a:rPr sz="1500">
+                <a:solidFill>
+                  <a:srgbClr val="22282E"/>
+                </a:solidFill>
+              </a:rPr>
+              <a:t>•  No. Feeds sin curar generan ruido y falsos positivos. Vale más un puñado de fuentes fiables, puntuadas y caducadas que un torrente de IOCs muertos.</a:t>
+            </a:r>
+          </a:p>
+          <a:p>
+            <a:pPr>
+              <a:spcAft>
+                <a:spcPts val="600"/>
+              </a:spcAft>
+            </a:pPr>
+            <a:r>
+              <a:rPr sz="1500">
+                <a:solidFill>
+                  <a:srgbClr val="22282E"/>
+                </a:solidFill>
+              </a:rPr>
+              <a:t>•  ❓ ¿La intel táctica (IOCs) basta?</a:t>
+            </a:r>
+          </a:p>
+          <a:p>
+            <a:pPr>
+              <a:spcAft>
+                <a:spcPts val="600"/>
+              </a:spcAft>
+            </a:pPr>
+            <a:r>
+              <a:rPr sz="1500">
+                <a:solidFill>
+                  <a:srgbClr val="22282E"/>
+                </a:solidFill>
+              </a:rPr>
+              <a:t>•  Es útil pero volátil: el atacante cambia hash e IP en segundos. Complétala con intel operacional y TTPs, que son mucho más duraderos de detectar.</a:t>
+            </a:r>
+          </a:p>
+          <a:p>
+            <a:pPr>
+              <a:spcAft>
+                <a:spcPts val="600"/>
+              </a:spcAft>
+            </a:pPr>
+            <a:r>
+              <a:rPr sz="1500">
+                <a:solidFill>
+                  <a:srgbClr val="22282E"/>
+                </a:solidFill>
+              </a:rPr>
+              <a:t>•  ❓ ¿Qué es el TLP?</a:t>
+            </a:r>
+          </a:p>
+          <a:p>
+            <a:pPr>
+              <a:spcAft>
+                <a:spcPts val="600"/>
+              </a:spcAft>
+            </a:pPr>
+            <a:r>
+              <a:rPr sz="1500">
+                <a:solidFill>
+                  <a:srgbClr val="22282E"/>
+                </a:solidFill>
+              </a:rPr>
+              <a:t>•  El Traffic Light Protocol clasifica cuánto puedes difundir una información (RED/AMBER/GREEN/CLEAR). Respetarlo es clave para participar en comunidades de compartición.</a:t>
+            </a:r>
+          </a:p>
+        </p:txBody>
+      </p:sp>
+    </p:spTree>
+  </p:cSld>
+  <p:clrMapOvr>
+    <a:masterClrMapping/>
+  </p:clrMapOvr>
+</p:sld>
+</file>
+
+<file path=ppt/slides/slide16.xml><?xml version="1.0" encoding="utf-8"?>
+<p:sld xmlns:a="http://schemas.openxmlformats.org/drawingml/2006/main" xmlns:p="http://schemas.openxmlformats.org/presentationml/2006/main" xmlns:r="http://schemas.openxmlformats.org/officeDocument/2006/relationships">
+  <p:cSld>
+    <p:spTree>
+      <p:nvGrpSpPr>
+        <p:cNvPr id="1" name=""/>
+        <p:cNvGrpSpPr/>
+        <p:nvPr/>
+      </p:nvGrpSpPr>
+      <p:grpSpPr/>
+      <p:sp>
+        <p:nvSpPr>
+          <p:cNvPr id="2" name="TextBox 1"/>
+          <p:cNvSpPr txBox="1"/>
+          <p:nvPr/>
+        </p:nvSpPr>
+        <p:spPr>
+          <a:xfrm>
+            <a:off x="457200" y="320040"/>
+            <a:ext cx="8229600" cy="822960"/>
+          </a:xfrm>
+          <a:prstGeom prst="rect">
+            <a:avLst/>
+          </a:prstGeom>
+          <a:noFill/>
+        </p:spPr>
+        <p:txBody>
+          <a:bodyPr wrap="square">
+            <a:spAutoFit/>
+          </a:bodyPr>
+          <a:lstStyle/>
+          <a:p>
+            <a:r>
+              <a:rPr sz="2600" b="1">
+                <a:solidFill>
+                  <a:srgbClr val="0B3D2E"/>
+                </a:solidFill>
+              </a:rPr>
+              <a:t>🔗 Referencias verificables y alcance</a:t>
+            </a:r>
+          </a:p>
+        </p:txBody>
+      </p:sp>
+      <p:sp>
+        <p:nvSpPr>
+          <p:cNvPr id="3" name="TextBox 2"/>
+          <p:cNvSpPr txBox="1"/>
+          <p:nvPr/>
+        </p:nvSpPr>
+        <p:spPr>
+          <a:xfrm>
+            <a:off x="457200" y="1280160"/>
+            <a:ext cx="8229600" cy="4937760"/>
+          </a:xfrm>
+          <a:prstGeom prst="rect">
+            <a:avLst/>
+          </a:prstGeom>
+          <a:noFill/>
+        </p:spPr>
+        <p:txBody>
+          <a:bodyPr wrap="square">
+            <a:spAutoFit/>
+          </a:bodyPr>
+          <a:lstStyle/>
+          <a:p>
+            <a:pPr>
+              <a:spcAft>
+                <a:spcPts val="600"/>
+              </a:spcAft>
+            </a:pPr>
+            <a:r>
+              <a:rPr sz="1500">
+                <a:solidFill>
+                  <a:srgbClr val="22282E"/>
+                </a:solidFill>
+              </a:rPr>
+              <a:t>•  OASIS CTI: documentación oficial de STIX 2.1 y TAXII 2.1 para representación e intercambio; estandarizar objetos no garantiza exactitud ni vigencia — &lt;https://oasis-open.github.io/cti-documentation/&gt;</a:t>
+            </a:r>
+          </a:p>
+          <a:p>
+            <a:pPr>
+              <a:spcAft>
+                <a:spcPts val="600"/>
+              </a:spcAft>
+            </a:pPr>
+            <a:r>
+              <a:rPr sz="1500">
+                <a:solidFill>
+                  <a:srgbClr val="22282E"/>
+                </a:solidFill>
+              </a:rPr>
+              <a:t>•  FIRST TLP 2.0: fuente oficial de las marcas y reglas de compartición TLP; no reemplaza controles legales, contractuales o de privacidad — &lt;https://www.first.org/tlp/&gt;</a:t>
+            </a:r>
+          </a:p>
+          <a:p>
+            <a:pPr>
+              <a:spcAft>
+                <a:spcPts val="600"/>
+              </a:spcAft>
+            </a:pPr>
+            <a:r>
+              <a:rPr sz="1500">
+                <a:solidFill>
+                  <a:srgbClr val="22282E"/>
+                </a:solidFill>
+              </a:rPr>
+              <a:t>•  MISP: documentación oficial de eventos, atributos, objetos, taxonomías y compartición — &lt;https://www.misp-project.org/documentation/&gt;</a:t>
+            </a:r>
+          </a:p>
+          <a:p>
+            <a:pPr>
+              <a:spcAft>
+                <a:spcPts val="600"/>
+              </a:spcAft>
+            </a:pPr>
+            <a:r>
+              <a:rPr sz="1500">
+                <a:solidFill>
+                  <a:srgbClr val="22282E"/>
+                </a:solidFill>
+              </a:rPr>
+              <a:t>•  OpenCTI: documentación oficial de su modelo de grafo basado en STIX 2.1; respalda relaciones y procedencia, no la atribución automática — &lt;https://docs.opencti.io/latest/usage/data-model/&gt;</a:t>
+            </a:r>
+          </a:p>
+          <a:p>
+            <a:pPr>
+              <a:spcAft>
+                <a:spcPts val="600"/>
+              </a:spcAft>
+            </a:pPr>
+            <a:r>
+              <a:rPr sz="1500">
+                <a:solidFill>
+                  <a:srgbClr val="22282E"/>
+                </a:solidFill>
+              </a:rPr>
+              <a:t>•  Murdoch, D. Blue Team Handbook: SOC, SIEM, and Threat Hunting Use Cases: bibliografía profesional complementaria para operacionalización.</a:t>
+            </a:r>
+          </a:p>
+        </p:txBody>
+      </p:sp>
+    </p:spTree>
+  </p:cSld>
+  <p:clrMapOvr>
+    <a:masterClrMapping/>
+  </p:clrMapOvr>
+</p:sld>
+</file>
+
+<file path=ppt/slides/slide17.xml><?xml version="1.0" encoding="utf-8"?>
+<p:sld xmlns:a="http://schemas.openxmlformats.org/drawingml/2006/main" xmlns:p="http://schemas.openxmlformats.org/presentationml/2006/main" xmlns:r="http://schemas.openxmlformats.org/officeDocument/2006/relationships">
+  <p:cSld>
+    <p:spTree>
+      <p:nvGrpSpPr>
+        <p:cNvPr id="1" name=""/>
+        <p:cNvGrpSpPr/>
+        <p:nvPr/>
+      </p:nvGrpSpPr>
+      <p:grpSpPr/>
+      <p:sp>
+        <p:nvSpPr>
+          <p:cNvPr id="2" name="TextBox 1"/>
+          <p:cNvSpPr txBox="1"/>
+          <p:nvPr/>
+        </p:nvSpPr>
+        <p:spPr>
+          <a:xfrm>
+            <a:off x="457200" y="274320"/>
+            <a:ext cx="8229600" cy="640080"/>
+          </a:xfrm>
+          <a:prstGeom prst="rect">
+            <a:avLst/>
+          </a:prstGeom>
+          <a:noFill/>
+        </p:spPr>
+        <p:txBody>
+          <a:bodyPr wrap="square">
+            <a:spAutoFit/>
+          </a:bodyPr>
+          <a:lstStyle/>
+          <a:p>
+            <a:r>
+              <a:rPr sz="2200" b="1">
+                <a:solidFill>
+                  <a:srgbClr val="0B3D2E"/>
+                </a:solidFill>
+              </a:rPr>
+              <a:t>Diagrama de la clase</a:t>
+            </a:r>
+          </a:p>
+        </p:txBody>
+      </p:sp>
+      <p:pic>
+        <p:nvPicPr>
+          <p:cNvPr id="3" name="Picture 2" descr="72fd6c05aa53202b.png"/>
+          <p:cNvPicPr>
+            <a:picLocks noChangeAspect="1"/>
+          </p:cNvPicPr>
+          <p:nvPr/>
+        </p:nvPicPr>
+        <p:blipFill>
+          <a:blip r:embed="rId2"/>
+          <a:stretch>
+            <a:fillRect/>
+          </a:stretch>
+        </p:blipFill>
+        <p:spPr>
+          <a:xfrm>
+            <a:off x="457200" y="3108960"/>
+            <a:ext cx="8229600" cy="1280160"/>
+          </a:xfrm>
+          <a:prstGeom prst="rect">
+            <a:avLst/>
+          </a:prstGeom>
+        </p:spPr>
+      </p:pic>
     </p:spTree>
   </p:cSld>
   <p:clrMapOvr>
@@ -3698,7 +4359,7 @@
                   <a:srgbClr val="22282E"/>
                 </a:solidFill>
               </a:rPr>
-              <a:t>•  Convertir la inteligencia de amenazas (threat intelligence) en detección y decisiones, no en un feed que nadie lee. Aprenderás a distinguir los niveles de intel (estratégica, operacional, táctica), a gestionar IOCs con una plataforma (MISP/OpenCTI), a puntuar su valor y a operacionalizarlos en el SIEM sin ahogarte en indicadores caducos.</a:t>
+              <a:t>•  Convertir la inteligencia de amenazas (threat intelligence) en detección y decisiones, no en un feed que nadie lee. Aprenderás a distinguir los niveles de intel (estratégica, operacional, táctica), a…</a:t>
             </a:r>
           </a:p>
         </p:txBody>
@@ -4092,7 +4753,7 @@
                   <a:srgbClr val="0B3D2E"/>
                 </a:solidFill>
               </a:rPr>
-              <a:t>📖 Definiciones y características</a:t>
+              <a:t>🧠 Explicación en profundidad</a:t>
             </a:r>
           </a:p>
         </p:txBody>
@@ -4130,97 +4791,97 @@
                   <a:srgbClr val="22282E"/>
                 </a:solidFill>
               </a:rPr>
-              <a:t>•  Threat intelligence: conocimiento sobre amenazas que informa decisiones. Característica: debe ser accionable y contextual, no un simple listado.</a:t>
-            </a:r>
-          </a:p>
-          <a:p>
-            <a:pPr>
-              <a:spcAft>
-                <a:spcPts val="600"/>
-              </a:spcAft>
-            </a:pPr>
-            <a:r>
-              <a:rPr sz="1500">
-                <a:solidFill>
-                  <a:srgbClr val="22282E"/>
-                </a:solidFill>
-              </a:rPr>
-              <a:t>•  Intel estratégica: tendencias y riesgos para la dirección. Característica: horizonte largo, lenguaje de negocio.</a:t>
-            </a:r>
-          </a:p>
-          <a:p>
-            <a:pPr>
-              <a:spcAft>
-                <a:spcPts val="600"/>
-              </a:spcAft>
-            </a:pPr>
-            <a:r>
-              <a:rPr sz="1500">
-                <a:solidFill>
-                  <a:srgbClr val="22282E"/>
-                </a:solidFill>
-              </a:rPr>
-              <a:t>•  Intel operacional: campañas y actores concretos. Característica: guía la priorización de detección.</a:t>
-            </a:r>
-          </a:p>
-          <a:p>
-            <a:pPr>
-              <a:spcAft>
-                <a:spcPts val="600"/>
-              </a:spcAft>
-            </a:pPr>
-            <a:r>
-              <a:rPr sz="1500">
-                <a:solidFill>
-                  <a:srgbClr val="22282E"/>
-                </a:solidFill>
-              </a:rPr>
-              <a:t>•  Intel táctica: IOCs y TTPs concretos. Característica: se consume en el SIEM/EDR de forma directa.</a:t>
-            </a:r>
-          </a:p>
-          <a:p>
-            <a:pPr>
-              <a:spcAft>
-                <a:spcPts val="600"/>
-              </a:spcAft>
-            </a:pPr>
-            <a:r>
-              <a:rPr sz="1500">
-                <a:solidFill>
-                  <a:srgbClr val="22282E"/>
-                </a:solidFill>
-              </a:rPr>
-              <a:t>•  IOC (Indicator of Compromise): artefacto observable de un ataque (hash, IP, dominio). Característica: fácil de operacionalizar, pero volátil (base de la pirámide del dolor).</a:t>
-            </a:r>
-          </a:p>
-          <a:p>
-            <a:pPr>
-              <a:spcAft>
-                <a:spcPts val="600"/>
-              </a:spcAft>
-            </a:pPr>
-            <a:r>
-              <a:rPr sz="1500">
-                <a:solidFill>
-                  <a:srgbClr val="22282E"/>
-                </a:solidFill>
-              </a:rPr>
-              <a:t>•  STIX/TAXII: formato y protocolo estándar para representar e intercambiar intel. Característica: interoperabilidad entre plataformas.</a:t>
-            </a:r>
-          </a:p>
-          <a:p>
-            <a:pPr>
-              <a:spcAft>
-                <a:spcPts val="600"/>
-              </a:spcAft>
-            </a:pPr>
-            <a:r>
-              <a:rPr sz="1500">
-                <a:solidFill>
-                  <a:srgbClr val="22282E"/>
-                </a:solidFill>
-              </a:rPr>
-              <a:t>•  TIP (Threat Intelligence Platform): software para agregar, enriquecer y distribuir intel (MISP, OpenCTI). Característica: gestiona ciclo de vida y scoring de indicadores.</a:t>
+              <a:t>•  La inteligencia empieza con una decisión del consumidor, no con un feed. Un requerimiento define qué necesita saber, para cuándo y qué acción habilitará. Lo estratégico orienta riesgo; lo operacional…</a:t>
+            </a:r>
+          </a:p>
+          <a:p>
+            <a:pPr>
+              <a:spcAft>
+                <a:spcPts val="600"/>
+              </a:spcAft>
+            </a:pPr>
+            <a:r>
+              <a:rPr sz="1500">
+                <a:solidFill>
+                  <a:srgbClr val="22282E"/>
+                </a:solidFill>
+              </a:rPr>
+              <a:t>•  Un observable es un hecho técnico; un indicador añade afirmación y contexto; una TTP suele persistir más que una IP. Cada objeto necesita procedencia, confianza, vigencia y retirada. STIX modela…</a:t>
+            </a:r>
+          </a:p>
+          <a:p>
+            <a:pPr>
+              <a:spcAft>
+                <a:spcPts val="600"/>
+              </a:spcAft>
+            </a:pPr>
+            <a:r>
+              <a:rPr sz="1500">
+                <a:solidFill>
+                  <a:srgbClr val="22282E"/>
+                </a:solidFill>
+              </a:rPr>
+              <a:t>•  «Recibir más indicadores» no define éxito. Un requerimiento podría ser: «¿qué infraestructura y procedimientos de campañas contra nuestro sector podemos convertir esta semana en controles para correo…</a:t>
+            </a:r>
+          </a:p>
+          <a:p>
+            <a:pPr>
+              <a:spcAft>
+                <a:spcPts val="600"/>
+              </a:spcAft>
+            </a:pPr>
+            <a:r>
+              <a:rPr sz="1500">
+                <a:solidFill>
+                  <a:srgbClr val="22282E"/>
+                </a:solidFill>
+              </a:rPr>
+              <a:t>•  Estratégica, operacional y táctica describen alcance y audiencia, no jerarquía de calidad. Dirección puede necesitar tendencia e impacto; respuesta, secuencia de campaña; detección, observables y…</a:t>
+            </a:r>
+          </a:p>
+          <a:p>
+            <a:pPr>
+              <a:spcAft>
+                <a:spcPts val="600"/>
+              </a:spcAft>
+            </a:pPr>
+            <a:r>
+              <a:rPr sz="1500">
+                <a:solidFill>
+                  <a:srgbClr val="22282E"/>
+                </a:solidFill>
+              </a:rPr>
+              <a:t>•  Una IP encontrada en un reporte es un observable. Se vuelve indicador cuando se añade relación, periodo, fuente y confianza: «servidor C2 observado por esta campaña entre estas fechas». La dirección…</a:t>
+            </a:r>
+          </a:p>
+          <a:p>
+            <a:pPr>
+              <a:spcAft>
+                <a:spcPts val="600"/>
+              </a:spcAft>
+            </a:pPr>
+            <a:r>
+              <a:rPr sz="1500">
+                <a:solidFill>
+                  <a:srgbClr val="22282E"/>
+                </a:solidFill>
+              </a:rPr>
+              <a:t>•  La confianza separa credibilidad de fuente y fuerza de la asociación. Dos fuentes pueden repetir el mismo origen y no ser independientes. Se preserva procedencia y se evita incrementar confianza solo…</a:t>
+            </a:r>
+          </a:p>
+          <a:p>
+            <a:pPr>
+              <a:spcAft>
+                <a:spcPts val="600"/>
+              </a:spcAft>
+            </a:pPr>
+            <a:r>
+              <a:rPr sz="1500">
+                <a:solidFill>
+                  <a:srgbClr val="22282E"/>
+                </a:solidFill>
+              </a:rPr>
+              <a:t>•  STIX representa objetos como indicator, malware, campaign o attack-pattern y sus relaciones; TAXII define servicios para intercambiarlos. Implementar ambos no garantiza calidad: objetos sin fechas…</a:t>
             </a:r>
           </a:p>
         </p:txBody>
@@ -4271,7 +4932,7 @@
                   <a:srgbClr val="0B3D2E"/>
                 </a:solidFill>
               </a:rPr>
-              <a:t>🧰 Herramientas y preparación</a:t>
+              <a:t>📔 Glosario</a:t>
             </a:r>
           </a:p>
         </p:txBody>
@@ -4309,67 +4970,97 @@
                   <a:srgbClr val="22282E"/>
                 </a:solidFill>
               </a:rPr>
-              <a:t>•  MISP o OpenCTI desplegado en laboratorio (Docker) como TIP.</a:t>
-            </a:r>
-          </a:p>
-          <a:p>
-            <a:pPr>
-              <a:spcAft>
-                <a:spcPts val="600"/>
-              </a:spcAft>
-            </a:pPr>
-            <a:r>
-              <a:rPr sz="1500">
-                <a:solidFill>
-                  <a:srgbClr val="22282E"/>
-                </a:solidFill>
-              </a:rPr>
-              <a:t>•  Feeds abiertos (p. ej. abuse.ch, listas OSINT) para poblar la plataforma.</a:t>
-            </a:r>
-          </a:p>
-          <a:p>
-            <a:pPr>
-              <a:spcAft>
-                <a:spcPts val="600"/>
-              </a:spcAft>
-            </a:pPr>
-            <a:r>
-              <a:rPr sz="1500">
-                <a:solidFill>
-                  <a:srgbClr val="22282E"/>
-                </a:solidFill>
-              </a:rPr>
-              <a:t>•  Conector STIX/TAXII hacia tu SIEM para consumir indicadores.</a:t>
-            </a:r>
-          </a:p>
-          <a:p>
-            <a:pPr>
-              <a:spcAft>
-                <a:spcPts val="600"/>
-              </a:spcAft>
-            </a:pPr>
-            <a:r>
-              <a:rPr sz="1500">
-                <a:solidFill>
-                  <a:srgbClr val="22282E"/>
-                </a:solidFill>
-              </a:rPr>
-              <a:t>•  Tu SIEM con capacidad de lookups/threat match (Splunk, Elastic Threat Intel).</a:t>
-            </a:r>
-          </a:p>
-          <a:p>
-            <a:pPr>
-              <a:spcAft>
-                <a:spcPts val="600"/>
-              </a:spcAft>
-            </a:pPr>
-            <a:r>
-              <a:rPr sz="1500">
-                <a:solidFill>
-                  <a:srgbClr val="22282E"/>
-                </a:solidFill>
-              </a:rPr>
-              <a:t>•  Usa únicamente feeds y fuentes públicas o autorizadas; no distribuyas intel sensible fuera de su marco de compartición (TLP).</a:t>
+              <a:t>•  PIR: requerimiento prioritario de inteligencia.</a:t>
+            </a:r>
+          </a:p>
+          <a:p>
+            <a:pPr>
+              <a:spcAft>
+                <a:spcPts val="600"/>
+              </a:spcAft>
+            </a:pPr>
+            <a:r>
+              <a:rPr sz="1500">
+                <a:solidFill>
+                  <a:srgbClr val="22282E"/>
+                </a:solidFill>
+              </a:rPr>
+              <a:t>•  Observable: dato técnico sin conclusión suficiente.</a:t>
+            </a:r>
+          </a:p>
+          <a:p>
+            <a:pPr>
+              <a:spcAft>
+                <a:spcPts val="600"/>
+              </a:spcAft>
+            </a:pPr>
+            <a:r>
+              <a:rPr sz="1500">
+                <a:solidFill>
+                  <a:srgbClr val="22282E"/>
+                </a:solidFill>
+              </a:rPr>
+              <a:t>•  Indicador: patrón contextualizado que puede señalar actividad.</a:t>
+            </a:r>
+          </a:p>
+          <a:p>
+            <a:pPr>
+              <a:spcAft>
+                <a:spcPts val="600"/>
+              </a:spcAft>
+            </a:pPr>
+            <a:r>
+              <a:rPr sz="1500">
+                <a:solidFill>
+                  <a:srgbClr val="22282E"/>
+                </a:solidFill>
+              </a:rPr>
+              <a:t>•  TTP: táctica, técnica o procedimiento.</a:t>
+            </a:r>
+          </a:p>
+          <a:p>
+            <a:pPr>
+              <a:spcAft>
+                <a:spcPts val="600"/>
+              </a:spcAft>
+            </a:pPr>
+            <a:r>
+              <a:rPr sz="1500">
+                <a:solidFill>
+                  <a:srgbClr val="22282E"/>
+                </a:solidFill>
+              </a:rPr>
+              <a:t>•  Provenance: origen y transformaciones de información.</a:t>
+            </a:r>
+          </a:p>
+          <a:p>
+            <a:pPr>
+              <a:spcAft>
+                <a:spcPts val="600"/>
+              </a:spcAft>
+            </a:pPr>
+            <a:r>
+              <a:rPr sz="1500">
+                <a:solidFill>
+                  <a:srgbClr val="22282E"/>
+                </a:solidFill>
+              </a:rPr>
+              <a:t>•  STIX: lenguaje estructurado para CTI.</a:t>
+            </a:r>
+          </a:p>
+          <a:p>
+            <a:pPr>
+              <a:spcAft>
+                <a:spcPts val="600"/>
+              </a:spcAft>
+            </a:pPr>
+            <a:r>
+              <a:rPr sz="1500">
+                <a:solidFill>
+                  <a:srgbClr val="22282E"/>
+                </a:solidFill>
+              </a:rPr>
+              <a:t>•  TAXII: protocolo de intercambio de CTI.</a:t>
             </a:r>
           </a:p>
         </p:txBody>
@@ -4420,7 +5111,7 @@
                   <a:srgbClr val="0B3D2E"/>
                 </a:solidFill>
               </a:rPr>
-              <a:t>🧪 Laboratorio guiado — De feed a detección</a:t>
+              <a:t>📖 Definiciones y características</a:t>
             </a:r>
           </a:p>
         </p:txBody>
@@ -4458,97 +5149,97 @@
                   <a:srgbClr val="22282E"/>
                 </a:solidFill>
               </a:rPr>
-              <a:t>•  Levanta el TIP. Despliega MISP/OpenCTI en Docker y accede al panel.</a:t>
-            </a:r>
-          </a:p>
-          <a:p>
-            <a:pPr>
-              <a:spcAft>
-                <a:spcPts val="600"/>
-              </a:spcAft>
-            </a:pPr>
-            <a:r>
-              <a:rPr sz="1500">
-                <a:solidFill>
-                  <a:srgbClr val="22282E"/>
-                </a:solidFill>
-              </a:rPr>
-              <a:t>•  Ingesta feeds. Habilita 2–3 feeds abiertos (p. ej. listas de C2/malware de abuse.ch) y sincroniza.</a:t>
-            </a:r>
-          </a:p>
-          <a:p>
-            <a:pPr>
-              <a:spcAft>
-                <a:spcPts val="600"/>
-              </a:spcAft>
-            </a:pPr>
-            <a:r>
-              <a:rPr sz="1500">
-                <a:solidFill>
-                  <a:srgbClr val="22282E"/>
-                </a:solidFill>
-              </a:rPr>
-              <a:t>•  Enriquece un evento. Toma un IOC de la clase 193 (dominio de tu beacon de laboratorio) y créalo como indicador con su contexto y TLP.</a:t>
-            </a:r>
-          </a:p>
-          <a:p>
-            <a:pPr>
-              <a:spcAft>
-                <a:spcPts val="600"/>
-              </a:spcAft>
-            </a:pPr>
-            <a:r>
-              <a:rPr sz="1500">
-                <a:solidFill>
-                  <a:srgbClr val="22282E"/>
-                </a:solidFill>
-              </a:rPr>
-              <a:t>•  Puntúa y caduca. Asigna un score y una fecha de expiración; revisa cómo la plataforma degrada indicadores viejos.</a:t>
-            </a:r>
-          </a:p>
-          <a:p>
-            <a:pPr>
-              <a:spcAft>
-                <a:spcPts val="600"/>
-              </a:spcAft>
-            </a:pPr>
-            <a:r>
-              <a:rPr sz="1500">
-                <a:solidFill>
-                  <a:srgbClr val="22282E"/>
-                </a:solidFill>
-              </a:rPr>
-              <a:t>•  Conecta al SIEM. Configura el consumo STIX/TAXII y un lookup de threat match sobre tráfico de red/DNS.</a:t>
-            </a:r>
-          </a:p>
-          <a:p>
-            <a:pPr>
-              <a:spcAft>
-                <a:spcPts val="600"/>
-              </a:spcAft>
-            </a:pPr>
-            <a:r>
-              <a:rPr sz="1500">
-                <a:solidFill>
-                  <a:srgbClr val="22282E"/>
-                </a:solidFill>
-              </a:rPr>
-              <a:t>•  Detecta con intel. Genera tráfico hacia un indicador de la lista y confirma que el SIEM lo marca.</a:t>
-            </a:r>
-          </a:p>
-          <a:p>
-            <a:pPr>
-              <a:spcAft>
-                <a:spcPts val="600"/>
-              </a:spcAft>
-            </a:pPr>
-            <a:r>
-              <a:rPr sz="1500">
-                <a:solidFill>
-                  <a:srgbClr val="22282E"/>
-                </a:solidFill>
-              </a:rPr>
-              <a:t>•  Prioriza por TTP. Mapea la campaña asociada a técnicas ATT&amp;CK y compárala con tu cobertura (clase 187).</a:t>
+              <a:t>•  Threat intelligence: conocimiento sobre amenazas que informa decisiones. Característica: debe ser accionable y contextual, no un simple listado.</a:t>
+            </a:r>
+          </a:p>
+          <a:p>
+            <a:pPr>
+              <a:spcAft>
+                <a:spcPts val="600"/>
+              </a:spcAft>
+            </a:pPr>
+            <a:r>
+              <a:rPr sz="1500">
+                <a:solidFill>
+                  <a:srgbClr val="22282E"/>
+                </a:solidFill>
+              </a:rPr>
+              <a:t>•  Intel estratégica: tendencias y riesgos para la dirección. Característica: horizonte largo, lenguaje de negocio.</a:t>
+            </a:r>
+          </a:p>
+          <a:p>
+            <a:pPr>
+              <a:spcAft>
+                <a:spcPts val="600"/>
+              </a:spcAft>
+            </a:pPr>
+            <a:r>
+              <a:rPr sz="1500">
+                <a:solidFill>
+                  <a:srgbClr val="22282E"/>
+                </a:solidFill>
+              </a:rPr>
+              <a:t>•  Intel operacional: campañas y actores concretos. Característica: guía la priorización de detección.</a:t>
+            </a:r>
+          </a:p>
+          <a:p>
+            <a:pPr>
+              <a:spcAft>
+                <a:spcPts val="600"/>
+              </a:spcAft>
+            </a:pPr>
+            <a:r>
+              <a:rPr sz="1500">
+                <a:solidFill>
+                  <a:srgbClr val="22282E"/>
+                </a:solidFill>
+              </a:rPr>
+              <a:t>•  Intel táctica: IOCs y TTPs concretos. Característica: se consume en el SIEM/EDR de forma directa.</a:t>
+            </a:r>
+          </a:p>
+          <a:p>
+            <a:pPr>
+              <a:spcAft>
+                <a:spcPts val="600"/>
+              </a:spcAft>
+            </a:pPr>
+            <a:r>
+              <a:rPr sz="1500">
+                <a:solidFill>
+                  <a:srgbClr val="22282E"/>
+                </a:solidFill>
+              </a:rPr>
+              <a:t>•  IOC (Indicator of Compromise): artefacto observable de un ataque (hash, IP, dominio). Característica: fácil de operacionalizar, pero volátil (base de la pirámide del dolor).</a:t>
+            </a:r>
+          </a:p>
+          <a:p>
+            <a:pPr>
+              <a:spcAft>
+                <a:spcPts val="600"/>
+              </a:spcAft>
+            </a:pPr>
+            <a:r>
+              <a:rPr sz="1500">
+                <a:solidFill>
+                  <a:srgbClr val="22282E"/>
+                </a:solidFill>
+              </a:rPr>
+              <a:t>•  STIX/TAXII: formato y protocolo estándar para representar e intercambiar intel. Característica: interoperabilidad entre plataformas.</a:t>
+            </a:r>
+          </a:p>
+          <a:p>
+            <a:pPr>
+              <a:spcAft>
+                <a:spcPts val="600"/>
+              </a:spcAft>
+            </a:pPr>
+            <a:r>
+              <a:rPr sz="1500">
+                <a:solidFill>
+                  <a:srgbClr val="22282E"/>
+                </a:solidFill>
+              </a:rPr>
+              <a:t>•  TIP (Threat Intelligence Platform): software para agregar, enriquecer y distribuir intel (MISP, OpenCTI). Característica: gestiona ciclo de vida y scoring de indicadores.</a:t>
             </a:r>
           </a:p>
         </p:txBody>
@@ -4599,7 +5290,7 @@
                   <a:srgbClr val="0B3D2E"/>
                 </a:solidFill>
               </a:rPr>
-              <a:t>✍️ Ejercicios</a:t>
+              <a:t>🔍 Producto resuelto — campaña contra identidad</a:t>
             </a:r>
           </a:p>
         </p:txBody>
@@ -4637,82 +5328,37 @@
                   <a:srgbClr val="22282E"/>
                 </a:solidFill>
               </a:rPr>
-              <a:t>•  Clasifica 5 piezas de intel en estratégica/operacional/táctica.</a:t>
-            </a:r>
-          </a:p>
-          <a:p>
-            <a:pPr>
-              <a:spcAft>
-                <a:spcPts val="600"/>
-              </a:spcAft>
-            </a:pPr>
-            <a:r>
-              <a:rPr sz="1500">
-                <a:solidFill>
-                  <a:srgbClr val="22282E"/>
-                </a:solidFill>
-              </a:rPr>
-              <a:t>•  Explica por qué los IOCs caducan y cómo gestionarlo con scoring.</a:t>
-            </a:r>
-          </a:p>
-          <a:p>
-            <a:pPr>
-              <a:spcAft>
-                <a:spcPts val="600"/>
-              </a:spcAft>
-            </a:pPr>
-            <a:r>
-              <a:rPr sz="1500">
-                <a:solidFill>
-                  <a:srgbClr val="22282E"/>
-                </a:solidFill>
-              </a:rPr>
-              <a:t>•  Diseña el flujo del ciclo de inteligencia para tu SOC.</a:t>
-            </a:r>
-          </a:p>
-          <a:p>
-            <a:pPr>
-              <a:spcAft>
-                <a:spcPts val="600"/>
-              </a:spcAft>
-            </a:pPr>
-            <a:r>
-              <a:rPr sz="1500">
-                <a:solidFill>
-                  <a:srgbClr val="22282E"/>
-                </a:solidFill>
-              </a:rPr>
-              <a:t>•  Configura un lookup de threat match y prueba un hit.</a:t>
-            </a:r>
-          </a:p>
-          <a:p>
-            <a:pPr>
-              <a:spcAft>
-                <a:spcPts val="600"/>
-              </a:spcAft>
-            </a:pPr>
-            <a:r>
-              <a:rPr sz="1500">
-                <a:solidFill>
-                  <a:srgbClr val="22282E"/>
-                </a:solidFill>
-              </a:rPr>
-              <a:t>•  Compara MISP y OpenCTI en modelo de datos y casos de uso.</a:t>
-            </a:r>
-          </a:p>
-          <a:p>
-            <a:pPr>
-              <a:spcAft>
-                <a:spcPts val="600"/>
-              </a:spcAft>
-            </a:pPr>
-            <a:r>
-              <a:rPr sz="1500">
-                <a:solidFill>
-                  <a:srgbClr val="22282E"/>
-                </a:solidFill>
-              </a:rPr>
-              <a:t>•  Explica el semáforo TLP y cuándo se puede compartir cada nivel.</a:t>
+              <a:t>•  El requerimiento pregunta qué infraestructura y procedimientos de una campaña reciente pueden cambiar controles de identidad esta semana. Se recogen reportes primarios y observaciones internas. Una…</a:t>
+            </a:r>
+          </a:p>
+          <a:p>
+            <a:pPr>
+              <a:spcAft>
+                <a:spcPts val="600"/>
+              </a:spcAft>
+            </a:pPr>
+            <a:r>
+              <a:rPr sz="1500">
+                <a:solidFill>
+                  <a:srgbClr val="22282E"/>
+                </a:solidFill>
+              </a:rPr>
+              <a:t>•  El análisis encuentra además uso de aplicaciones OAuth y phishing de sesión. Esas TTP producen acciones más duraderas: revisar consentimientos, detectar aplicaciones nuevas y monitorizar tokens. Para…</a:t>
+            </a:r>
+          </a:p>
+          <a:p>
+            <a:pPr>
+              <a:spcAft>
+                <a:spcPts val="600"/>
+              </a:spcAft>
+            </a:pPr>
+            <a:r>
+              <a:rPr sz="1500">
+                <a:solidFill>
+                  <a:srgbClr val="22282E"/>
+                </a:solidFill>
+              </a:rPr>
+              <a:t>•  En STIX se modelan objetos y relaciones; TAXII puede transportarlos. Antes de bloquear una IP se busca retrospectivamente y se evalúa infraestructura compartida. TLP regula compartición del producto…</a:t>
             </a:r>
           </a:p>
         </p:txBody>
@@ -4763,7 +5409,7 @@
                   <a:srgbClr val="0B3D2E"/>
                 </a:solidFill>
               </a:rPr>
-              <a:t>📝 Reto verificable</a:t>
+              <a:t>✅ Criterio de dominio</a:t>
             </a:r>
           </a:p>
         </p:txBody>
@@ -4801,7 +5447,7 @@
                   <a:srgbClr val="22282E"/>
                 </a:solidFill>
               </a:rPr>
-              <a:t>•  Operacionaliza un conjunto de indicadores desde tu TIP hasta una detección funcional en el SIEM, con scoring y caducidad definidos. Criterio de aceptación: un evento de tu laboratorio que coincide con un indicador dispara una alerta enriquecida con el contexto de la intel (fuente, TLP, campaña/ATT&amp;CK), y demuestras que un indicador caducado deja de generar ruido.</a:t>
+              <a:t>•  El alumno parte de un requerimiento, diferencia observable, indicador y TTP, conserva procedencia/tiempo/confianza, y demuestra qué decisión produjo el producto. Importar un feed sin consumidores ni…</a:t>
             </a:r>
           </a:p>
         </p:txBody>
